--- a/public/videos/repositories/funeral-hall-map/funeral-hall-map-tech-preview.pptx
+++ b/public/videos/repositories/funeral-hall-map/funeral-hall-map-tech-preview.pptx
@@ -134,7 +134,7 @@
           <p:cNvPr id="2" name="タイトル 1">
             <a:extLst>
               <a:ext uri="{FF2B5EF4-FFF2-40B4-BE49-F238E27FC236}">
-                <a16:creationId xmlns:a16="http://schemas.microsoft.com/office/drawing/2014/main" id="{4BBD2B7F-8F09-E02F-412A-CF0562C19C1F}"/>
+                <a16:creationId xmlns:a16="http://schemas.microsoft.com/office/drawing/2014/main" id="{2EB2CB48-1566-F668-90F0-9B7EA821A952}"/>
               </a:ext>
             </a:extLst>
           </p:cNvPr>
@@ -171,7 +171,7 @@
           <p:cNvPr id="3" name="字幕 2">
             <a:extLst>
               <a:ext uri="{FF2B5EF4-FFF2-40B4-BE49-F238E27FC236}">
-                <a16:creationId xmlns:a16="http://schemas.microsoft.com/office/drawing/2014/main" id="{F182FE77-843C-2194-450F-046857B81912}"/>
+                <a16:creationId xmlns:a16="http://schemas.microsoft.com/office/drawing/2014/main" id="{689BA0B7-0268-9F41-945D-A665E962E132}"/>
               </a:ext>
             </a:extLst>
           </p:cNvPr>
@@ -241,7 +241,7 @@
           <p:cNvPr id="4" name="日付プレースホルダー 3">
             <a:extLst>
               <a:ext uri="{FF2B5EF4-FFF2-40B4-BE49-F238E27FC236}">
-                <a16:creationId xmlns:a16="http://schemas.microsoft.com/office/drawing/2014/main" id="{AB5F09FB-68AF-F420-6355-6D159168D5CD}"/>
+                <a16:creationId xmlns:a16="http://schemas.microsoft.com/office/drawing/2014/main" id="{BA6E2D49-36D4-FD51-5AEB-AC19A396AEA5}"/>
               </a:ext>
             </a:extLst>
           </p:cNvPr>
@@ -257,7 +257,7 @@
           <a:bodyPr/>
           <a:lstStyle/>
           <a:p>
-            <a:fld id="{FF2FF8D1-E886-4749-A1ED-70CE0C20E357}" type="datetimeFigureOut">
+            <a:fld id="{1338D0CB-F17E-40C3-B67E-E0968F995E5A}" type="datetimeFigureOut">
               <a:rPr kumimoji="1" lang="ja-JP" altLang="en-US" smtClean="0"/>
               <a:t>2026/7/30</a:t>
             </a:fld>
@@ -270,7 +270,7 @@
           <p:cNvPr id="5" name="フッター プレースホルダー 4">
             <a:extLst>
               <a:ext uri="{FF2B5EF4-FFF2-40B4-BE49-F238E27FC236}">
-                <a16:creationId xmlns:a16="http://schemas.microsoft.com/office/drawing/2014/main" id="{44E455BC-CAE8-795D-EE9B-6AA3A42C3BC6}"/>
+                <a16:creationId xmlns:a16="http://schemas.microsoft.com/office/drawing/2014/main" id="{EE6F69ED-E2C6-7528-A2ED-A3310F9C9E9D}"/>
               </a:ext>
             </a:extLst>
           </p:cNvPr>
@@ -295,7 +295,7 @@
           <p:cNvPr id="6" name="スライド番号プレースホルダー 5">
             <a:extLst>
               <a:ext uri="{FF2B5EF4-FFF2-40B4-BE49-F238E27FC236}">
-                <a16:creationId xmlns:a16="http://schemas.microsoft.com/office/drawing/2014/main" id="{8F6B8D1F-4174-318F-E1CC-F15DFEF70A81}"/>
+                <a16:creationId xmlns:a16="http://schemas.microsoft.com/office/drawing/2014/main" id="{088FE3EC-C258-91FB-E1A5-E8DE0464FAE5}"/>
               </a:ext>
             </a:extLst>
           </p:cNvPr>
@@ -311,7 +311,7 @@
           <a:bodyPr/>
           <a:lstStyle/>
           <a:p>
-            <a:fld id="{C3CC25DC-5C11-4F8D-AA87-CFFAB9558400}" type="slidenum">
+            <a:fld id="{AB4F66D4-50C9-4297-B4C6-C9969037CF83}" type="slidenum">
               <a:rPr kumimoji="1" lang="ja-JP" altLang="en-US" smtClean="0"/>
               <a:t>‹#›</a:t>
             </a:fld>
@@ -322,7 +322,7 @@
     </p:spTree>
     <p:extLst>
       <p:ext uri="{BB962C8B-B14F-4D97-AF65-F5344CB8AC3E}">
-        <p14:creationId xmlns:p14="http://schemas.microsoft.com/office/powerpoint/2010/main" val="182893896"/>
+        <p14:creationId xmlns:p14="http://schemas.microsoft.com/office/powerpoint/2010/main" val="2026938936"/>
       </p:ext>
     </p:extLst>
   </p:cSld>
@@ -354,7 +354,7 @@
           <p:cNvPr id="2" name="タイトル 1">
             <a:extLst>
               <a:ext uri="{FF2B5EF4-FFF2-40B4-BE49-F238E27FC236}">
-                <a16:creationId xmlns:a16="http://schemas.microsoft.com/office/drawing/2014/main" id="{36F32C31-4BDB-D13D-8C7B-18A41E950A0C}"/>
+                <a16:creationId xmlns:a16="http://schemas.microsoft.com/office/drawing/2014/main" id="{42DC096A-0CC5-FA91-4AAB-F0A0CAB4319C}"/>
               </a:ext>
             </a:extLst>
           </p:cNvPr>
@@ -382,7 +382,7 @@
           <p:cNvPr id="3" name="縦書きテキスト プレースホルダー 2">
             <a:extLst>
               <a:ext uri="{FF2B5EF4-FFF2-40B4-BE49-F238E27FC236}">
-                <a16:creationId xmlns:a16="http://schemas.microsoft.com/office/drawing/2014/main" id="{1183B5D5-DB3F-CBA3-587E-B33D57DC6773}"/>
+                <a16:creationId xmlns:a16="http://schemas.microsoft.com/office/drawing/2014/main" id="{B8330FEF-3F65-85F2-B584-7ED56DAD9041}"/>
               </a:ext>
             </a:extLst>
           </p:cNvPr>
@@ -471,7 +471,7 @@
           <p:cNvPr id="4" name="日付プレースホルダー 3">
             <a:extLst>
               <a:ext uri="{FF2B5EF4-FFF2-40B4-BE49-F238E27FC236}">
-                <a16:creationId xmlns:a16="http://schemas.microsoft.com/office/drawing/2014/main" id="{8FAFA5DB-EFAD-0557-8569-8F829B9D900E}"/>
+                <a16:creationId xmlns:a16="http://schemas.microsoft.com/office/drawing/2014/main" id="{30E0BCC9-E558-A1F0-5435-25404BA5F6D4}"/>
               </a:ext>
             </a:extLst>
           </p:cNvPr>
@@ -487,7 +487,7 @@
           <a:bodyPr/>
           <a:lstStyle/>
           <a:p>
-            <a:fld id="{FF2FF8D1-E886-4749-A1ED-70CE0C20E357}" type="datetimeFigureOut">
+            <a:fld id="{1338D0CB-F17E-40C3-B67E-E0968F995E5A}" type="datetimeFigureOut">
               <a:rPr kumimoji="1" lang="ja-JP" altLang="en-US" smtClean="0"/>
               <a:t>2026/7/30</a:t>
             </a:fld>
@@ -500,7 +500,7 @@
           <p:cNvPr id="5" name="フッター プレースホルダー 4">
             <a:extLst>
               <a:ext uri="{FF2B5EF4-FFF2-40B4-BE49-F238E27FC236}">
-                <a16:creationId xmlns:a16="http://schemas.microsoft.com/office/drawing/2014/main" id="{613D685C-C3D4-68CD-0E2C-E61B2D0E37F7}"/>
+                <a16:creationId xmlns:a16="http://schemas.microsoft.com/office/drawing/2014/main" id="{C50C90BB-A5F1-4881-918B-D1A355A4D67F}"/>
               </a:ext>
             </a:extLst>
           </p:cNvPr>
@@ -525,7 +525,7 @@
           <p:cNvPr id="6" name="スライド番号プレースホルダー 5">
             <a:extLst>
               <a:ext uri="{FF2B5EF4-FFF2-40B4-BE49-F238E27FC236}">
-                <a16:creationId xmlns:a16="http://schemas.microsoft.com/office/drawing/2014/main" id="{1255257C-9F15-DB39-AD50-72456F8B25ED}"/>
+                <a16:creationId xmlns:a16="http://schemas.microsoft.com/office/drawing/2014/main" id="{9E994379-8F2B-4BB9-4DDF-07231A002E5C}"/>
               </a:ext>
             </a:extLst>
           </p:cNvPr>
@@ -541,7 +541,7 @@
           <a:bodyPr/>
           <a:lstStyle/>
           <a:p>
-            <a:fld id="{C3CC25DC-5C11-4F8D-AA87-CFFAB9558400}" type="slidenum">
+            <a:fld id="{AB4F66D4-50C9-4297-B4C6-C9969037CF83}" type="slidenum">
               <a:rPr kumimoji="1" lang="ja-JP" altLang="en-US" smtClean="0"/>
               <a:t>‹#›</a:t>
             </a:fld>
@@ -552,7 +552,7 @@
     </p:spTree>
     <p:extLst>
       <p:ext uri="{BB962C8B-B14F-4D97-AF65-F5344CB8AC3E}">
-        <p14:creationId xmlns:p14="http://schemas.microsoft.com/office/powerpoint/2010/main" val="73114404"/>
+        <p14:creationId xmlns:p14="http://schemas.microsoft.com/office/powerpoint/2010/main" val="682448516"/>
       </p:ext>
     </p:extLst>
   </p:cSld>
@@ -584,7 +584,7 @@
           <p:cNvPr id="2" name="縦書きタイトル 1">
             <a:extLst>
               <a:ext uri="{FF2B5EF4-FFF2-40B4-BE49-F238E27FC236}">
-                <a16:creationId xmlns:a16="http://schemas.microsoft.com/office/drawing/2014/main" id="{912DF29D-D831-6E0B-0747-237E4469131A}"/>
+                <a16:creationId xmlns:a16="http://schemas.microsoft.com/office/drawing/2014/main" id="{47E50F5D-70AA-F0CC-DF02-C0A8F2ACBB3E}"/>
               </a:ext>
             </a:extLst>
           </p:cNvPr>
@@ -617,7 +617,7 @@
           <p:cNvPr id="3" name="縦書きテキスト プレースホルダー 2">
             <a:extLst>
               <a:ext uri="{FF2B5EF4-FFF2-40B4-BE49-F238E27FC236}">
-                <a16:creationId xmlns:a16="http://schemas.microsoft.com/office/drawing/2014/main" id="{70CC46BF-8CAD-3F94-946E-439FA0A5705C}"/>
+                <a16:creationId xmlns:a16="http://schemas.microsoft.com/office/drawing/2014/main" id="{33313A81-C2D4-C6CB-3B42-94F6F4355F89}"/>
               </a:ext>
             </a:extLst>
           </p:cNvPr>
@@ -711,7 +711,7 @@
           <p:cNvPr id="4" name="日付プレースホルダー 3">
             <a:extLst>
               <a:ext uri="{FF2B5EF4-FFF2-40B4-BE49-F238E27FC236}">
-                <a16:creationId xmlns:a16="http://schemas.microsoft.com/office/drawing/2014/main" id="{038A4D99-7F95-25D4-407C-4A7FACD2E3FE}"/>
+                <a16:creationId xmlns:a16="http://schemas.microsoft.com/office/drawing/2014/main" id="{AAFE25C3-2D93-C2EB-B31E-BA6F6D2B3FCB}"/>
               </a:ext>
             </a:extLst>
           </p:cNvPr>
@@ -727,7 +727,7 @@
           <a:bodyPr/>
           <a:lstStyle/>
           <a:p>
-            <a:fld id="{FF2FF8D1-E886-4749-A1ED-70CE0C20E357}" type="datetimeFigureOut">
+            <a:fld id="{1338D0CB-F17E-40C3-B67E-E0968F995E5A}" type="datetimeFigureOut">
               <a:rPr kumimoji="1" lang="ja-JP" altLang="en-US" smtClean="0"/>
               <a:t>2026/7/30</a:t>
             </a:fld>
@@ -740,7 +740,7 @@
           <p:cNvPr id="5" name="フッター プレースホルダー 4">
             <a:extLst>
               <a:ext uri="{FF2B5EF4-FFF2-40B4-BE49-F238E27FC236}">
-                <a16:creationId xmlns:a16="http://schemas.microsoft.com/office/drawing/2014/main" id="{74C4919D-53B6-2EB6-1D13-E505CF5211B4}"/>
+                <a16:creationId xmlns:a16="http://schemas.microsoft.com/office/drawing/2014/main" id="{0BFAC623-19E6-F4FF-723D-B84ADD243BD5}"/>
               </a:ext>
             </a:extLst>
           </p:cNvPr>
@@ -765,7 +765,7 @@
           <p:cNvPr id="6" name="スライド番号プレースホルダー 5">
             <a:extLst>
               <a:ext uri="{FF2B5EF4-FFF2-40B4-BE49-F238E27FC236}">
-                <a16:creationId xmlns:a16="http://schemas.microsoft.com/office/drawing/2014/main" id="{602EB098-9B79-AD50-F012-17C31B928356}"/>
+                <a16:creationId xmlns:a16="http://schemas.microsoft.com/office/drawing/2014/main" id="{62736C8B-F508-1A79-7F2D-5E65C63AF84A}"/>
               </a:ext>
             </a:extLst>
           </p:cNvPr>
@@ -781,7 +781,7 @@
           <a:bodyPr/>
           <a:lstStyle/>
           <a:p>
-            <a:fld id="{C3CC25DC-5C11-4F8D-AA87-CFFAB9558400}" type="slidenum">
+            <a:fld id="{AB4F66D4-50C9-4297-B4C6-C9969037CF83}" type="slidenum">
               <a:rPr kumimoji="1" lang="ja-JP" altLang="en-US" smtClean="0"/>
               <a:t>‹#›</a:t>
             </a:fld>
@@ -792,7 +792,7 @@
     </p:spTree>
     <p:extLst>
       <p:ext uri="{BB962C8B-B14F-4D97-AF65-F5344CB8AC3E}">
-        <p14:creationId xmlns:p14="http://schemas.microsoft.com/office/powerpoint/2010/main" val="1178651281"/>
+        <p14:creationId xmlns:p14="http://schemas.microsoft.com/office/powerpoint/2010/main" val="1025587588"/>
       </p:ext>
     </p:extLst>
   </p:cSld>
@@ -824,7 +824,7 @@
           <p:cNvPr id="2" name="タイトル 1">
             <a:extLst>
               <a:ext uri="{FF2B5EF4-FFF2-40B4-BE49-F238E27FC236}">
-                <a16:creationId xmlns:a16="http://schemas.microsoft.com/office/drawing/2014/main" id="{70741B47-02D9-316A-1A0B-DDC648FCFE54}"/>
+                <a16:creationId xmlns:a16="http://schemas.microsoft.com/office/drawing/2014/main" id="{965F28AA-B160-7FA7-3942-AE421D2ECCA5}"/>
               </a:ext>
             </a:extLst>
           </p:cNvPr>
@@ -852,7 +852,7 @@
           <p:cNvPr id="3" name="コンテンツ プレースホルダー 2">
             <a:extLst>
               <a:ext uri="{FF2B5EF4-FFF2-40B4-BE49-F238E27FC236}">
-                <a16:creationId xmlns:a16="http://schemas.microsoft.com/office/drawing/2014/main" id="{B1ADB3D4-2815-3C84-9FA5-A15EA9971ED4}"/>
+                <a16:creationId xmlns:a16="http://schemas.microsoft.com/office/drawing/2014/main" id="{6F5D801E-6791-A2B8-F4DA-5760C28A781F}"/>
               </a:ext>
             </a:extLst>
           </p:cNvPr>
@@ -941,7 +941,7 @@
           <p:cNvPr id="4" name="日付プレースホルダー 3">
             <a:extLst>
               <a:ext uri="{FF2B5EF4-FFF2-40B4-BE49-F238E27FC236}">
-                <a16:creationId xmlns:a16="http://schemas.microsoft.com/office/drawing/2014/main" id="{F6C5F80D-0E56-01C0-D075-40BE8CF6C8D8}"/>
+                <a16:creationId xmlns:a16="http://schemas.microsoft.com/office/drawing/2014/main" id="{E5CD9B49-BA93-1EFF-9F7B-24FB20D193D9}"/>
               </a:ext>
             </a:extLst>
           </p:cNvPr>
@@ -957,7 +957,7 @@
           <a:bodyPr/>
           <a:lstStyle/>
           <a:p>
-            <a:fld id="{FF2FF8D1-E886-4749-A1ED-70CE0C20E357}" type="datetimeFigureOut">
+            <a:fld id="{1338D0CB-F17E-40C3-B67E-E0968F995E5A}" type="datetimeFigureOut">
               <a:rPr kumimoji="1" lang="ja-JP" altLang="en-US" smtClean="0"/>
               <a:t>2026/7/30</a:t>
             </a:fld>
@@ -970,7 +970,7 @@
           <p:cNvPr id="5" name="フッター プレースホルダー 4">
             <a:extLst>
               <a:ext uri="{FF2B5EF4-FFF2-40B4-BE49-F238E27FC236}">
-                <a16:creationId xmlns:a16="http://schemas.microsoft.com/office/drawing/2014/main" id="{A06721B8-317F-6F24-25E0-AD430C03EE1C}"/>
+                <a16:creationId xmlns:a16="http://schemas.microsoft.com/office/drawing/2014/main" id="{F73AD392-441E-1E9B-4ADD-AE871A550C6A}"/>
               </a:ext>
             </a:extLst>
           </p:cNvPr>
@@ -995,7 +995,7 @@
           <p:cNvPr id="6" name="スライド番号プレースホルダー 5">
             <a:extLst>
               <a:ext uri="{FF2B5EF4-FFF2-40B4-BE49-F238E27FC236}">
-                <a16:creationId xmlns:a16="http://schemas.microsoft.com/office/drawing/2014/main" id="{5715571E-E04B-CC36-B53A-952FAD192D57}"/>
+                <a16:creationId xmlns:a16="http://schemas.microsoft.com/office/drawing/2014/main" id="{FD08C0B9-B245-9733-A917-34C32327C237}"/>
               </a:ext>
             </a:extLst>
           </p:cNvPr>
@@ -1011,7 +1011,7 @@
           <a:bodyPr/>
           <a:lstStyle/>
           <a:p>
-            <a:fld id="{C3CC25DC-5C11-4F8D-AA87-CFFAB9558400}" type="slidenum">
+            <a:fld id="{AB4F66D4-50C9-4297-B4C6-C9969037CF83}" type="slidenum">
               <a:rPr kumimoji="1" lang="ja-JP" altLang="en-US" smtClean="0"/>
               <a:t>‹#›</a:t>
             </a:fld>
@@ -1022,7 +1022,7 @@
     </p:spTree>
     <p:extLst>
       <p:ext uri="{BB962C8B-B14F-4D97-AF65-F5344CB8AC3E}">
-        <p14:creationId xmlns:p14="http://schemas.microsoft.com/office/powerpoint/2010/main" val="498249781"/>
+        <p14:creationId xmlns:p14="http://schemas.microsoft.com/office/powerpoint/2010/main" val="2450810085"/>
       </p:ext>
     </p:extLst>
   </p:cSld>
@@ -1054,7 +1054,7 @@
           <p:cNvPr id="2" name="タイトル 1">
             <a:extLst>
               <a:ext uri="{FF2B5EF4-FFF2-40B4-BE49-F238E27FC236}">
-                <a16:creationId xmlns:a16="http://schemas.microsoft.com/office/drawing/2014/main" id="{35492E07-2016-E8BD-C54F-BC6F49563B22}"/>
+                <a16:creationId xmlns:a16="http://schemas.microsoft.com/office/drawing/2014/main" id="{68DE469A-5F57-58C4-7E80-DA19D8A6D9A4}"/>
               </a:ext>
             </a:extLst>
           </p:cNvPr>
@@ -1091,7 +1091,7 @@
           <p:cNvPr id="3" name="テキスト プレースホルダー 2">
             <a:extLst>
               <a:ext uri="{FF2B5EF4-FFF2-40B4-BE49-F238E27FC236}">
-                <a16:creationId xmlns:a16="http://schemas.microsoft.com/office/drawing/2014/main" id="{4C3B050D-8079-53E9-5E0B-2DEF50FF518C}"/>
+                <a16:creationId xmlns:a16="http://schemas.microsoft.com/office/drawing/2014/main" id="{E0621530-0905-282F-2792-830B90F49EDD}"/>
               </a:ext>
             </a:extLst>
           </p:cNvPr>
@@ -1216,7 +1216,7 @@
           <p:cNvPr id="4" name="日付プレースホルダー 3">
             <a:extLst>
               <a:ext uri="{FF2B5EF4-FFF2-40B4-BE49-F238E27FC236}">
-                <a16:creationId xmlns:a16="http://schemas.microsoft.com/office/drawing/2014/main" id="{02938B6E-66F3-6970-3E38-28D17D86ECDF}"/>
+                <a16:creationId xmlns:a16="http://schemas.microsoft.com/office/drawing/2014/main" id="{C736F1BB-878E-17E2-1514-98659AC7B74C}"/>
               </a:ext>
             </a:extLst>
           </p:cNvPr>
@@ -1232,7 +1232,7 @@
           <a:bodyPr/>
           <a:lstStyle/>
           <a:p>
-            <a:fld id="{FF2FF8D1-E886-4749-A1ED-70CE0C20E357}" type="datetimeFigureOut">
+            <a:fld id="{1338D0CB-F17E-40C3-B67E-E0968F995E5A}" type="datetimeFigureOut">
               <a:rPr kumimoji="1" lang="ja-JP" altLang="en-US" smtClean="0"/>
               <a:t>2026/7/30</a:t>
             </a:fld>
@@ -1245,7 +1245,7 @@
           <p:cNvPr id="5" name="フッター プレースホルダー 4">
             <a:extLst>
               <a:ext uri="{FF2B5EF4-FFF2-40B4-BE49-F238E27FC236}">
-                <a16:creationId xmlns:a16="http://schemas.microsoft.com/office/drawing/2014/main" id="{CF3FE2D7-168D-CEC8-28F8-45F881670002}"/>
+                <a16:creationId xmlns:a16="http://schemas.microsoft.com/office/drawing/2014/main" id="{87669F66-4844-639F-5EB6-19568F73A6B7}"/>
               </a:ext>
             </a:extLst>
           </p:cNvPr>
@@ -1270,7 +1270,7 @@
           <p:cNvPr id="6" name="スライド番号プレースホルダー 5">
             <a:extLst>
               <a:ext uri="{FF2B5EF4-FFF2-40B4-BE49-F238E27FC236}">
-                <a16:creationId xmlns:a16="http://schemas.microsoft.com/office/drawing/2014/main" id="{42E89413-5171-5C92-21E8-D3D62827DC36}"/>
+                <a16:creationId xmlns:a16="http://schemas.microsoft.com/office/drawing/2014/main" id="{F6E203BB-C09B-96D5-AD9E-4EF1D12EABC5}"/>
               </a:ext>
             </a:extLst>
           </p:cNvPr>
@@ -1286,7 +1286,7 @@
           <a:bodyPr/>
           <a:lstStyle/>
           <a:p>
-            <a:fld id="{C3CC25DC-5C11-4F8D-AA87-CFFAB9558400}" type="slidenum">
+            <a:fld id="{AB4F66D4-50C9-4297-B4C6-C9969037CF83}" type="slidenum">
               <a:rPr kumimoji="1" lang="ja-JP" altLang="en-US" smtClean="0"/>
               <a:t>‹#›</a:t>
             </a:fld>
@@ -1297,7 +1297,7 @@
     </p:spTree>
     <p:extLst>
       <p:ext uri="{BB962C8B-B14F-4D97-AF65-F5344CB8AC3E}">
-        <p14:creationId xmlns:p14="http://schemas.microsoft.com/office/powerpoint/2010/main" val="1828718038"/>
+        <p14:creationId xmlns:p14="http://schemas.microsoft.com/office/powerpoint/2010/main" val="581229059"/>
       </p:ext>
     </p:extLst>
   </p:cSld>
@@ -1329,7 +1329,7 @@
           <p:cNvPr id="2" name="タイトル 1">
             <a:extLst>
               <a:ext uri="{FF2B5EF4-FFF2-40B4-BE49-F238E27FC236}">
-                <a16:creationId xmlns:a16="http://schemas.microsoft.com/office/drawing/2014/main" id="{70689CE5-91DE-DBF2-3DA9-FFE848BDF3B5}"/>
+                <a16:creationId xmlns:a16="http://schemas.microsoft.com/office/drawing/2014/main" id="{DBA7D07E-514A-0D45-6E5B-D8B41F07ADC2}"/>
               </a:ext>
             </a:extLst>
           </p:cNvPr>
@@ -1357,7 +1357,7 @@
           <p:cNvPr id="3" name="コンテンツ プレースホルダー 2">
             <a:extLst>
               <a:ext uri="{FF2B5EF4-FFF2-40B4-BE49-F238E27FC236}">
-                <a16:creationId xmlns:a16="http://schemas.microsoft.com/office/drawing/2014/main" id="{63A5C611-3016-6A85-951B-FB0AFDD9C489}"/>
+                <a16:creationId xmlns:a16="http://schemas.microsoft.com/office/drawing/2014/main" id="{45DB3862-1D7E-F2D4-0226-BFFED62E2E9B}"/>
               </a:ext>
             </a:extLst>
           </p:cNvPr>
@@ -1451,7 +1451,7 @@
           <p:cNvPr id="4" name="コンテンツ プレースホルダー 3">
             <a:extLst>
               <a:ext uri="{FF2B5EF4-FFF2-40B4-BE49-F238E27FC236}">
-                <a16:creationId xmlns:a16="http://schemas.microsoft.com/office/drawing/2014/main" id="{2E227CB6-8810-1CA2-E96B-DF83492BD6EB}"/>
+                <a16:creationId xmlns:a16="http://schemas.microsoft.com/office/drawing/2014/main" id="{0A9EFFDB-F25A-3CF7-45F7-752FC86E74F9}"/>
               </a:ext>
             </a:extLst>
           </p:cNvPr>
@@ -1545,7 +1545,7 @@
           <p:cNvPr id="5" name="日付プレースホルダー 4">
             <a:extLst>
               <a:ext uri="{FF2B5EF4-FFF2-40B4-BE49-F238E27FC236}">
-                <a16:creationId xmlns:a16="http://schemas.microsoft.com/office/drawing/2014/main" id="{884D7D5C-E119-D23E-5E25-6E16C8EB63C3}"/>
+                <a16:creationId xmlns:a16="http://schemas.microsoft.com/office/drawing/2014/main" id="{27CA2185-FD25-05BE-4033-2ECF6456A810}"/>
               </a:ext>
             </a:extLst>
           </p:cNvPr>
@@ -1561,7 +1561,7 @@
           <a:bodyPr/>
           <a:lstStyle/>
           <a:p>
-            <a:fld id="{FF2FF8D1-E886-4749-A1ED-70CE0C20E357}" type="datetimeFigureOut">
+            <a:fld id="{1338D0CB-F17E-40C3-B67E-E0968F995E5A}" type="datetimeFigureOut">
               <a:rPr kumimoji="1" lang="ja-JP" altLang="en-US" smtClean="0"/>
               <a:t>2026/7/30</a:t>
             </a:fld>
@@ -1574,7 +1574,7 @@
           <p:cNvPr id="6" name="フッター プレースホルダー 5">
             <a:extLst>
               <a:ext uri="{FF2B5EF4-FFF2-40B4-BE49-F238E27FC236}">
-                <a16:creationId xmlns:a16="http://schemas.microsoft.com/office/drawing/2014/main" id="{0882E59B-00DF-D72F-46E2-63F85E38C937}"/>
+                <a16:creationId xmlns:a16="http://schemas.microsoft.com/office/drawing/2014/main" id="{3021EEB0-5D92-5A69-102F-A8F44A9193EF}"/>
               </a:ext>
             </a:extLst>
           </p:cNvPr>
@@ -1599,7 +1599,7 @@
           <p:cNvPr id="7" name="スライド番号プレースホルダー 6">
             <a:extLst>
               <a:ext uri="{FF2B5EF4-FFF2-40B4-BE49-F238E27FC236}">
-                <a16:creationId xmlns:a16="http://schemas.microsoft.com/office/drawing/2014/main" id="{5A9C860A-6AF6-7F5F-A55F-BE48A49F1E83}"/>
+                <a16:creationId xmlns:a16="http://schemas.microsoft.com/office/drawing/2014/main" id="{64C4E02A-3AA5-A631-B0D3-15520F61731D}"/>
               </a:ext>
             </a:extLst>
           </p:cNvPr>
@@ -1615,7 +1615,7 @@
           <a:bodyPr/>
           <a:lstStyle/>
           <a:p>
-            <a:fld id="{C3CC25DC-5C11-4F8D-AA87-CFFAB9558400}" type="slidenum">
+            <a:fld id="{AB4F66D4-50C9-4297-B4C6-C9969037CF83}" type="slidenum">
               <a:rPr kumimoji="1" lang="ja-JP" altLang="en-US" smtClean="0"/>
               <a:t>‹#›</a:t>
             </a:fld>
@@ -1626,7 +1626,7 @@
     </p:spTree>
     <p:extLst>
       <p:ext uri="{BB962C8B-B14F-4D97-AF65-F5344CB8AC3E}">
-        <p14:creationId xmlns:p14="http://schemas.microsoft.com/office/powerpoint/2010/main" val="317460001"/>
+        <p14:creationId xmlns:p14="http://schemas.microsoft.com/office/powerpoint/2010/main" val="3655660755"/>
       </p:ext>
     </p:extLst>
   </p:cSld>
@@ -1658,7 +1658,7 @@
           <p:cNvPr id="2" name="タイトル 1">
             <a:extLst>
               <a:ext uri="{FF2B5EF4-FFF2-40B4-BE49-F238E27FC236}">
-                <a16:creationId xmlns:a16="http://schemas.microsoft.com/office/drawing/2014/main" id="{0E969111-45DB-0CA3-A7AF-9C497EF3A463}"/>
+                <a16:creationId xmlns:a16="http://schemas.microsoft.com/office/drawing/2014/main" id="{8C052F5C-64C6-8567-B548-86342E741E73}"/>
               </a:ext>
             </a:extLst>
           </p:cNvPr>
@@ -1691,7 +1691,7 @@
           <p:cNvPr id="3" name="テキスト プレースホルダー 2">
             <a:extLst>
               <a:ext uri="{FF2B5EF4-FFF2-40B4-BE49-F238E27FC236}">
-                <a16:creationId xmlns:a16="http://schemas.microsoft.com/office/drawing/2014/main" id="{6A9E2822-0C53-8271-3693-76B580ABEC31}"/>
+                <a16:creationId xmlns:a16="http://schemas.microsoft.com/office/drawing/2014/main" id="{046E3F11-5A83-7466-7777-08C24253BD3C}"/>
               </a:ext>
             </a:extLst>
           </p:cNvPr>
@@ -1762,7 +1762,7 @@
           <p:cNvPr id="4" name="コンテンツ プレースホルダー 3">
             <a:extLst>
               <a:ext uri="{FF2B5EF4-FFF2-40B4-BE49-F238E27FC236}">
-                <a16:creationId xmlns:a16="http://schemas.microsoft.com/office/drawing/2014/main" id="{78BAAADA-189E-A6DF-6B5F-297597ED9771}"/>
+                <a16:creationId xmlns:a16="http://schemas.microsoft.com/office/drawing/2014/main" id="{62C8ABDC-B386-7219-70DA-8F9531FD554C}"/>
               </a:ext>
             </a:extLst>
           </p:cNvPr>
@@ -1856,7 +1856,7 @@
           <p:cNvPr id="5" name="テキスト プレースホルダー 4">
             <a:extLst>
               <a:ext uri="{FF2B5EF4-FFF2-40B4-BE49-F238E27FC236}">
-                <a16:creationId xmlns:a16="http://schemas.microsoft.com/office/drawing/2014/main" id="{F234E0B9-B5B6-C1B1-7B66-72430E5CF92C}"/>
+                <a16:creationId xmlns:a16="http://schemas.microsoft.com/office/drawing/2014/main" id="{D15A016E-D6B1-E09A-33AA-F12EC8EE4193}"/>
               </a:ext>
             </a:extLst>
           </p:cNvPr>
@@ -1927,7 +1927,7 @@
           <p:cNvPr id="6" name="コンテンツ プレースホルダー 5">
             <a:extLst>
               <a:ext uri="{FF2B5EF4-FFF2-40B4-BE49-F238E27FC236}">
-                <a16:creationId xmlns:a16="http://schemas.microsoft.com/office/drawing/2014/main" id="{0EF4A975-3159-A5CB-583D-6809F67A040A}"/>
+                <a16:creationId xmlns:a16="http://schemas.microsoft.com/office/drawing/2014/main" id="{A5656229-52C4-E9A0-120D-C70967352DD7}"/>
               </a:ext>
             </a:extLst>
           </p:cNvPr>
@@ -2021,7 +2021,7 @@
           <p:cNvPr id="7" name="日付プレースホルダー 6">
             <a:extLst>
               <a:ext uri="{FF2B5EF4-FFF2-40B4-BE49-F238E27FC236}">
-                <a16:creationId xmlns:a16="http://schemas.microsoft.com/office/drawing/2014/main" id="{07B0D7D8-4EA9-1B2B-09E8-A755042616A9}"/>
+                <a16:creationId xmlns:a16="http://schemas.microsoft.com/office/drawing/2014/main" id="{F61E863A-0594-7B8B-2E80-F14DF18476D5}"/>
               </a:ext>
             </a:extLst>
           </p:cNvPr>
@@ -2037,7 +2037,7 @@
           <a:bodyPr/>
           <a:lstStyle/>
           <a:p>
-            <a:fld id="{FF2FF8D1-E886-4749-A1ED-70CE0C20E357}" type="datetimeFigureOut">
+            <a:fld id="{1338D0CB-F17E-40C3-B67E-E0968F995E5A}" type="datetimeFigureOut">
               <a:rPr kumimoji="1" lang="ja-JP" altLang="en-US" smtClean="0"/>
               <a:t>2026/7/30</a:t>
             </a:fld>
@@ -2050,7 +2050,7 @@
           <p:cNvPr id="8" name="フッター プレースホルダー 7">
             <a:extLst>
               <a:ext uri="{FF2B5EF4-FFF2-40B4-BE49-F238E27FC236}">
-                <a16:creationId xmlns:a16="http://schemas.microsoft.com/office/drawing/2014/main" id="{01AD9549-039E-06F3-8F1E-88E3F3F6A806}"/>
+                <a16:creationId xmlns:a16="http://schemas.microsoft.com/office/drawing/2014/main" id="{8042F973-670A-0C1E-0D88-54CBA3D543AF}"/>
               </a:ext>
             </a:extLst>
           </p:cNvPr>
@@ -2075,7 +2075,7 @@
           <p:cNvPr id="9" name="スライド番号プレースホルダー 8">
             <a:extLst>
               <a:ext uri="{FF2B5EF4-FFF2-40B4-BE49-F238E27FC236}">
-                <a16:creationId xmlns:a16="http://schemas.microsoft.com/office/drawing/2014/main" id="{CE7EAF5D-5710-EBE5-E8E6-492A6991935F}"/>
+                <a16:creationId xmlns:a16="http://schemas.microsoft.com/office/drawing/2014/main" id="{C4F4B85D-46C8-00B7-9B4F-558AC449ABA8}"/>
               </a:ext>
             </a:extLst>
           </p:cNvPr>
@@ -2091,7 +2091,7 @@
           <a:bodyPr/>
           <a:lstStyle/>
           <a:p>
-            <a:fld id="{C3CC25DC-5C11-4F8D-AA87-CFFAB9558400}" type="slidenum">
+            <a:fld id="{AB4F66D4-50C9-4297-B4C6-C9969037CF83}" type="slidenum">
               <a:rPr kumimoji="1" lang="ja-JP" altLang="en-US" smtClean="0"/>
               <a:t>‹#›</a:t>
             </a:fld>
@@ -2102,7 +2102,7 @@
     </p:spTree>
     <p:extLst>
       <p:ext uri="{BB962C8B-B14F-4D97-AF65-F5344CB8AC3E}">
-        <p14:creationId xmlns:p14="http://schemas.microsoft.com/office/powerpoint/2010/main" val="1674375204"/>
+        <p14:creationId xmlns:p14="http://schemas.microsoft.com/office/powerpoint/2010/main" val="1592683461"/>
       </p:ext>
     </p:extLst>
   </p:cSld>
@@ -2134,7 +2134,7 @@
           <p:cNvPr id="2" name="タイトル 1">
             <a:extLst>
               <a:ext uri="{FF2B5EF4-FFF2-40B4-BE49-F238E27FC236}">
-                <a16:creationId xmlns:a16="http://schemas.microsoft.com/office/drawing/2014/main" id="{00C6C39F-5591-27D9-C144-C0C188234B89}"/>
+                <a16:creationId xmlns:a16="http://schemas.microsoft.com/office/drawing/2014/main" id="{589CBED7-53EF-3517-76D7-2C2C5A972C03}"/>
               </a:ext>
             </a:extLst>
           </p:cNvPr>
@@ -2162,7 +2162,7 @@
           <p:cNvPr id="3" name="日付プレースホルダー 2">
             <a:extLst>
               <a:ext uri="{FF2B5EF4-FFF2-40B4-BE49-F238E27FC236}">
-                <a16:creationId xmlns:a16="http://schemas.microsoft.com/office/drawing/2014/main" id="{F9DA18A5-9674-EA17-B44D-83EC79777EDF}"/>
+                <a16:creationId xmlns:a16="http://schemas.microsoft.com/office/drawing/2014/main" id="{86D8782C-A1BD-A720-B032-431BBF726F83}"/>
               </a:ext>
             </a:extLst>
           </p:cNvPr>
@@ -2178,7 +2178,7 @@
           <a:bodyPr/>
           <a:lstStyle/>
           <a:p>
-            <a:fld id="{FF2FF8D1-E886-4749-A1ED-70CE0C20E357}" type="datetimeFigureOut">
+            <a:fld id="{1338D0CB-F17E-40C3-B67E-E0968F995E5A}" type="datetimeFigureOut">
               <a:rPr kumimoji="1" lang="ja-JP" altLang="en-US" smtClean="0"/>
               <a:t>2026/7/30</a:t>
             </a:fld>
@@ -2191,7 +2191,7 @@
           <p:cNvPr id="4" name="フッター プレースホルダー 3">
             <a:extLst>
               <a:ext uri="{FF2B5EF4-FFF2-40B4-BE49-F238E27FC236}">
-                <a16:creationId xmlns:a16="http://schemas.microsoft.com/office/drawing/2014/main" id="{7F0F345B-0EFB-3D6B-F67B-948E19801C71}"/>
+                <a16:creationId xmlns:a16="http://schemas.microsoft.com/office/drawing/2014/main" id="{E2A5B5BB-C9D3-F303-C8D2-B426200AE79F}"/>
               </a:ext>
             </a:extLst>
           </p:cNvPr>
@@ -2216,7 +2216,7 @@
           <p:cNvPr id="5" name="スライド番号プレースホルダー 4">
             <a:extLst>
               <a:ext uri="{FF2B5EF4-FFF2-40B4-BE49-F238E27FC236}">
-                <a16:creationId xmlns:a16="http://schemas.microsoft.com/office/drawing/2014/main" id="{21019969-BB75-B085-3B97-EA4236B48D9E}"/>
+                <a16:creationId xmlns:a16="http://schemas.microsoft.com/office/drawing/2014/main" id="{C825AA6E-6F6A-EC0D-3FFE-C54757FB8A4E}"/>
               </a:ext>
             </a:extLst>
           </p:cNvPr>
@@ -2232,7 +2232,7 @@
           <a:bodyPr/>
           <a:lstStyle/>
           <a:p>
-            <a:fld id="{C3CC25DC-5C11-4F8D-AA87-CFFAB9558400}" type="slidenum">
+            <a:fld id="{AB4F66D4-50C9-4297-B4C6-C9969037CF83}" type="slidenum">
               <a:rPr kumimoji="1" lang="ja-JP" altLang="en-US" smtClean="0"/>
               <a:t>‹#›</a:t>
             </a:fld>
@@ -2243,7 +2243,7 @@
     </p:spTree>
     <p:extLst>
       <p:ext uri="{BB962C8B-B14F-4D97-AF65-F5344CB8AC3E}">
-        <p14:creationId xmlns:p14="http://schemas.microsoft.com/office/powerpoint/2010/main" val="2004106723"/>
+        <p14:creationId xmlns:p14="http://schemas.microsoft.com/office/powerpoint/2010/main" val="1595522367"/>
       </p:ext>
     </p:extLst>
   </p:cSld>
@@ -2275,7 +2275,7 @@
           <p:cNvPr id="2" name="日付プレースホルダー 1">
             <a:extLst>
               <a:ext uri="{FF2B5EF4-FFF2-40B4-BE49-F238E27FC236}">
-                <a16:creationId xmlns:a16="http://schemas.microsoft.com/office/drawing/2014/main" id="{E5C2BBE0-6AEA-12A9-6F48-576DC587EAE4}"/>
+                <a16:creationId xmlns:a16="http://schemas.microsoft.com/office/drawing/2014/main" id="{04C0C6C1-0F8C-5660-6BC3-009639F728EF}"/>
               </a:ext>
             </a:extLst>
           </p:cNvPr>
@@ -2291,7 +2291,7 @@
           <a:bodyPr/>
           <a:lstStyle/>
           <a:p>
-            <a:fld id="{FF2FF8D1-E886-4749-A1ED-70CE0C20E357}" type="datetimeFigureOut">
+            <a:fld id="{1338D0CB-F17E-40C3-B67E-E0968F995E5A}" type="datetimeFigureOut">
               <a:rPr kumimoji="1" lang="ja-JP" altLang="en-US" smtClean="0"/>
               <a:t>2026/7/30</a:t>
             </a:fld>
@@ -2304,7 +2304,7 @@
           <p:cNvPr id="3" name="フッター プレースホルダー 2">
             <a:extLst>
               <a:ext uri="{FF2B5EF4-FFF2-40B4-BE49-F238E27FC236}">
-                <a16:creationId xmlns:a16="http://schemas.microsoft.com/office/drawing/2014/main" id="{4D13B214-5BB7-FB60-4ABF-AE825C9A6B13}"/>
+                <a16:creationId xmlns:a16="http://schemas.microsoft.com/office/drawing/2014/main" id="{6046968E-C143-017D-6D5A-3FF43B9E3519}"/>
               </a:ext>
             </a:extLst>
           </p:cNvPr>
@@ -2329,7 +2329,7 @@
           <p:cNvPr id="4" name="スライド番号プレースホルダー 3">
             <a:extLst>
               <a:ext uri="{FF2B5EF4-FFF2-40B4-BE49-F238E27FC236}">
-                <a16:creationId xmlns:a16="http://schemas.microsoft.com/office/drawing/2014/main" id="{FC37F6D6-074F-9F0C-57AC-5EC5067DB2E6}"/>
+                <a16:creationId xmlns:a16="http://schemas.microsoft.com/office/drawing/2014/main" id="{FB9E79A9-04D2-99E1-A3E4-674E2C6773BC}"/>
               </a:ext>
             </a:extLst>
           </p:cNvPr>
@@ -2345,7 +2345,7 @@
           <a:bodyPr/>
           <a:lstStyle/>
           <a:p>
-            <a:fld id="{C3CC25DC-5C11-4F8D-AA87-CFFAB9558400}" type="slidenum">
+            <a:fld id="{AB4F66D4-50C9-4297-B4C6-C9969037CF83}" type="slidenum">
               <a:rPr kumimoji="1" lang="ja-JP" altLang="en-US" smtClean="0"/>
               <a:t>‹#›</a:t>
             </a:fld>
@@ -2356,7 +2356,7 @@
     </p:spTree>
     <p:extLst>
       <p:ext uri="{BB962C8B-B14F-4D97-AF65-F5344CB8AC3E}">
-        <p14:creationId xmlns:p14="http://schemas.microsoft.com/office/powerpoint/2010/main" val="542181028"/>
+        <p14:creationId xmlns:p14="http://schemas.microsoft.com/office/powerpoint/2010/main" val="362643136"/>
       </p:ext>
     </p:extLst>
   </p:cSld>
@@ -2388,7 +2388,7 @@
           <p:cNvPr id="2" name="タイトル 1">
             <a:extLst>
               <a:ext uri="{FF2B5EF4-FFF2-40B4-BE49-F238E27FC236}">
-                <a16:creationId xmlns:a16="http://schemas.microsoft.com/office/drawing/2014/main" id="{97FA9193-FF4F-15F4-B994-79914904DE07}"/>
+                <a16:creationId xmlns:a16="http://schemas.microsoft.com/office/drawing/2014/main" id="{47159114-7C39-9F67-6FE4-27E2956DACB5}"/>
               </a:ext>
             </a:extLst>
           </p:cNvPr>
@@ -2425,7 +2425,7 @@
           <p:cNvPr id="3" name="コンテンツ プレースホルダー 2">
             <a:extLst>
               <a:ext uri="{FF2B5EF4-FFF2-40B4-BE49-F238E27FC236}">
-                <a16:creationId xmlns:a16="http://schemas.microsoft.com/office/drawing/2014/main" id="{93FBDB45-DED8-ABC3-BFF5-672680985E54}"/>
+                <a16:creationId xmlns:a16="http://schemas.microsoft.com/office/drawing/2014/main" id="{FCDD11FA-98D0-B415-0258-12398FD0D29B}"/>
               </a:ext>
             </a:extLst>
           </p:cNvPr>
@@ -2547,7 +2547,7 @@
           <p:cNvPr id="4" name="テキスト プレースホルダー 3">
             <a:extLst>
               <a:ext uri="{FF2B5EF4-FFF2-40B4-BE49-F238E27FC236}">
-                <a16:creationId xmlns:a16="http://schemas.microsoft.com/office/drawing/2014/main" id="{3453EA34-4550-8F42-02BB-BF6BBF71EAA2}"/>
+                <a16:creationId xmlns:a16="http://schemas.microsoft.com/office/drawing/2014/main" id="{1726EC6C-07F9-52BA-2F45-BDB6BB9E3330}"/>
               </a:ext>
             </a:extLst>
           </p:cNvPr>
@@ -2618,7 +2618,7 @@
           <p:cNvPr id="5" name="日付プレースホルダー 4">
             <a:extLst>
               <a:ext uri="{FF2B5EF4-FFF2-40B4-BE49-F238E27FC236}">
-                <a16:creationId xmlns:a16="http://schemas.microsoft.com/office/drawing/2014/main" id="{82040E6B-2805-4A5D-AD8F-B03F4058D7C0}"/>
+                <a16:creationId xmlns:a16="http://schemas.microsoft.com/office/drawing/2014/main" id="{B3BDA74C-52CE-F612-B3A7-5F0A8B28F789}"/>
               </a:ext>
             </a:extLst>
           </p:cNvPr>
@@ -2634,7 +2634,7 @@
           <a:bodyPr/>
           <a:lstStyle/>
           <a:p>
-            <a:fld id="{FF2FF8D1-E886-4749-A1ED-70CE0C20E357}" type="datetimeFigureOut">
+            <a:fld id="{1338D0CB-F17E-40C3-B67E-E0968F995E5A}" type="datetimeFigureOut">
               <a:rPr kumimoji="1" lang="ja-JP" altLang="en-US" smtClean="0"/>
               <a:t>2026/7/30</a:t>
             </a:fld>
@@ -2647,7 +2647,7 @@
           <p:cNvPr id="6" name="フッター プレースホルダー 5">
             <a:extLst>
               <a:ext uri="{FF2B5EF4-FFF2-40B4-BE49-F238E27FC236}">
-                <a16:creationId xmlns:a16="http://schemas.microsoft.com/office/drawing/2014/main" id="{ABD6D0E9-4DEB-49F8-BD9C-A9AEA3F6D87E}"/>
+                <a16:creationId xmlns:a16="http://schemas.microsoft.com/office/drawing/2014/main" id="{B9D51980-B370-75C6-393E-86789CD4F24F}"/>
               </a:ext>
             </a:extLst>
           </p:cNvPr>
@@ -2672,7 +2672,7 @@
           <p:cNvPr id="7" name="スライド番号プレースホルダー 6">
             <a:extLst>
               <a:ext uri="{FF2B5EF4-FFF2-40B4-BE49-F238E27FC236}">
-                <a16:creationId xmlns:a16="http://schemas.microsoft.com/office/drawing/2014/main" id="{A090374D-687C-169E-2677-6800177A1D15}"/>
+                <a16:creationId xmlns:a16="http://schemas.microsoft.com/office/drawing/2014/main" id="{A1D5437D-7A5D-4B98-9983-96499B45FE1D}"/>
               </a:ext>
             </a:extLst>
           </p:cNvPr>
@@ -2688,7 +2688,7 @@
           <a:bodyPr/>
           <a:lstStyle/>
           <a:p>
-            <a:fld id="{C3CC25DC-5C11-4F8D-AA87-CFFAB9558400}" type="slidenum">
+            <a:fld id="{AB4F66D4-50C9-4297-B4C6-C9969037CF83}" type="slidenum">
               <a:rPr kumimoji="1" lang="ja-JP" altLang="en-US" smtClean="0"/>
               <a:t>‹#›</a:t>
             </a:fld>
@@ -2699,7 +2699,7 @@
     </p:spTree>
     <p:extLst>
       <p:ext uri="{BB962C8B-B14F-4D97-AF65-F5344CB8AC3E}">
-        <p14:creationId xmlns:p14="http://schemas.microsoft.com/office/powerpoint/2010/main" val="93726853"/>
+        <p14:creationId xmlns:p14="http://schemas.microsoft.com/office/powerpoint/2010/main" val="2291135914"/>
       </p:ext>
     </p:extLst>
   </p:cSld>
@@ -2731,7 +2731,7 @@
           <p:cNvPr id="2" name="タイトル 1">
             <a:extLst>
               <a:ext uri="{FF2B5EF4-FFF2-40B4-BE49-F238E27FC236}">
-                <a16:creationId xmlns:a16="http://schemas.microsoft.com/office/drawing/2014/main" id="{DC6D5A59-EEA2-1D4D-8598-1AD813A0773A}"/>
+                <a16:creationId xmlns:a16="http://schemas.microsoft.com/office/drawing/2014/main" id="{2D059160-727D-8182-46E1-2BB62EC2E809}"/>
               </a:ext>
             </a:extLst>
           </p:cNvPr>
@@ -2768,7 +2768,7 @@
           <p:cNvPr id="3" name="図プレースホルダー 2">
             <a:extLst>
               <a:ext uri="{FF2B5EF4-FFF2-40B4-BE49-F238E27FC236}">
-                <a16:creationId xmlns:a16="http://schemas.microsoft.com/office/drawing/2014/main" id="{50694CF9-CD8E-9B9B-3413-D00D1EE3B783}"/>
+                <a16:creationId xmlns:a16="http://schemas.microsoft.com/office/drawing/2014/main" id="{1A30805A-0D87-BEC6-D76E-B76DA057C922}"/>
               </a:ext>
             </a:extLst>
           </p:cNvPr>
@@ -2835,7 +2835,7 @@
           <p:cNvPr id="4" name="テキスト プレースホルダー 3">
             <a:extLst>
               <a:ext uri="{FF2B5EF4-FFF2-40B4-BE49-F238E27FC236}">
-                <a16:creationId xmlns:a16="http://schemas.microsoft.com/office/drawing/2014/main" id="{7AE271D9-DC73-D81B-182A-A56E3939121D}"/>
+                <a16:creationId xmlns:a16="http://schemas.microsoft.com/office/drawing/2014/main" id="{2B68FDA6-71AC-3715-5460-94EADDBA22D7}"/>
               </a:ext>
             </a:extLst>
           </p:cNvPr>
@@ -2906,7 +2906,7 @@
           <p:cNvPr id="5" name="日付プレースホルダー 4">
             <a:extLst>
               <a:ext uri="{FF2B5EF4-FFF2-40B4-BE49-F238E27FC236}">
-                <a16:creationId xmlns:a16="http://schemas.microsoft.com/office/drawing/2014/main" id="{D71DE5B1-D7B2-1AC2-CC83-E185125ACFD5}"/>
+                <a16:creationId xmlns:a16="http://schemas.microsoft.com/office/drawing/2014/main" id="{FF5E505F-325F-A583-0857-9815E05A5A9E}"/>
               </a:ext>
             </a:extLst>
           </p:cNvPr>
@@ -2922,7 +2922,7 @@
           <a:bodyPr/>
           <a:lstStyle/>
           <a:p>
-            <a:fld id="{FF2FF8D1-E886-4749-A1ED-70CE0C20E357}" type="datetimeFigureOut">
+            <a:fld id="{1338D0CB-F17E-40C3-B67E-E0968F995E5A}" type="datetimeFigureOut">
               <a:rPr kumimoji="1" lang="ja-JP" altLang="en-US" smtClean="0"/>
               <a:t>2026/7/30</a:t>
             </a:fld>
@@ -2935,7 +2935,7 @@
           <p:cNvPr id="6" name="フッター プレースホルダー 5">
             <a:extLst>
               <a:ext uri="{FF2B5EF4-FFF2-40B4-BE49-F238E27FC236}">
-                <a16:creationId xmlns:a16="http://schemas.microsoft.com/office/drawing/2014/main" id="{247302CC-C02A-5A97-F4CA-20A7BB749152}"/>
+                <a16:creationId xmlns:a16="http://schemas.microsoft.com/office/drawing/2014/main" id="{2E1765B2-DF2A-EFEB-0338-10F1DDDA400B}"/>
               </a:ext>
             </a:extLst>
           </p:cNvPr>
@@ -2960,7 +2960,7 @@
           <p:cNvPr id="7" name="スライド番号プレースホルダー 6">
             <a:extLst>
               <a:ext uri="{FF2B5EF4-FFF2-40B4-BE49-F238E27FC236}">
-                <a16:creationId xmlns:a16="http://schemas.microsoft.com/office/drawing/2014/main" id="{68A17DBA-F122-46F2-D120-162661087B34}"/>
+                <a16:creationId xmlns:a16="http://schemas.microsoft.com/office/drawing/2014/main" id="{81028C0A-43E9-40E0-009D-2C61886BB785}"/>
               </a:ext>
             </a:extLst>
           </p:cNvPr>
@@ -2976,7 +2976,7 @@
           <a:bodyPr/>
           <a:lstStyle/>
           <a:p>
-            <a:fld id="{C3CC25DC-5C11-4F8D-AA87-CFFAB9558400}" type="slidenum">
+            <a:fld id="{AB4F66D4-50C9-4297-B4C6-C9969037CF83}" type="slidenum">
               <a:rPr kumimoji="1" lang="ja-JP" altLang="en-US" smtClean="0"/>
               <a:t>‹#›</a:t>
             </a:fld>
@@ -2987,7 +2987,7 @@
     </p:spTree>
     <p:extLst>
       <p:ext uri="{BB962C8B-B14F-4D97-AF65-F5344CB8AC3E}">
-        <p14:creationId xmlns:p14="http://schemas.microsoft.com/office/powerpoint/2010/main" val="3788670044"/>
+        <p14:creationId xmlns:p14="http://schemas.microsoft.com/office/powerpoint/2010/main" val="492058614"/>
       </p:ext>
     </p:extLst>
   </p:cSld>
@@ -3024,7 +3024,7 @@
           <p:cNvPr id="2" name="タイトル プレースホルダー 1">
             <a:extLst>
               <a:ext uri="{FF2B5EF4-FFF2-40B4-BE49-F238E27FC236}">
-                <a16:creationId xmlns:a16="http://schemas.microsoft.com/office/drawing/2014/main" id="{4BB947C9-A2EF-B496-B9BE-1DC0E9AA88DF}"/>
+                <a16:creationId xmlns:a16="http://schemas.microsoft.com/office/drawing/2014/main" id="{DF345105-B77C-D9D6-FEDD-A755CB0DA940}"/>
               </a:ext>
             </a:extLst>
           </p:cNvPr>
@@ -3062,7 +3062,7 @@
           <p:cNvPr id="3" name="テキスト プレースホルダー 2">
             <a:extLst>
               <a:ext uri="{FF2B5EF4-FFF2-40B4-BE49-F238E27FC236}">
-                <a16:creationId xmlns:a16="http://schemas.microsoft.com/office/drawing/2014/main" id="{A5D5F9D8-6344-56A0-A6D1-3C4229E99E1A}"/>
+                <a16:creationId xmlns:a16="http://schemas.microsoft.com/office/drawing/2014/main" id="{D33A176E-0AA5-F18D-AA1B-32472BE5AD71}"/>
               </a:ext>
             </a:extLst>
           </p:cNvPr>
@@ -3161,7 +3161,7 @@
           <p:cNvPr id="4" name="日付プレースホルダー 3">
             <a:extLst>
               <a:ext uri="{FF2B5EF4-FFF2-40B4-BE49-F238E27FC236}">
-                <a16:creationId xmlns:a16="http://schemas.microsoft.com/office/drawing/2014/main" id="{631D57D1-03B1-998E-D904-02EA07FA20E3}"/>
+                <a16:creationId xmlns:a16="http://schemas.microsoft.com/office/drawing/2014/main" id="{485CFE99-C0C4-42AC-C5F6-557591E57B5B}"/>
               </a:ext>
             </a:extLst>
           </p:cNvPr>
@@ -3195,7 +3195,7 @@
             </a:lvl1pPr>
           </a:lstStyle>
           <a:p>
-            <a:fld id="{FF2FF8D1-E886-4749-A1ED-70CE0C20E357}" type="datetimeFigureOut">
+            <a:fld id="{1338D0CB-F17E-40C3-B67E-E0968F995E5A}" type="datetimeFigureOut">
               <a:rPr kumimoji="1" lang="ja-JP" altLang="en-US" smtClean="0"/>
               <a:t>2026/7/30</a:t>
             </a:fld>
@@ -3208,7 +3208,7 @@
           <p:cNvPr id="5" name="フッター プレースホルダー 4">
             <a:extLst>
               <a:ext uri="{FF2B5EF4-FFF2-40B4-BE49-F238E27FC236}">
-                <a16:creationId xmlns:a16="http://schemas.microsoft.com/office/drawing/2014/main" id="{D69D6095-2E6E-9C20-2DBE-43A8D92ABB52}"/>
+                <a16:creationId xmlns:a16="http://schemas.microsoft.com/office/drawing/2014/main" id="{7ABD54AB-E6F8-A50D-2284-A8A55A2EA43F}"/>
               </a:ext>
             </a:extLst>
           </p:cNvPr>
@@ -3251,7 +3251,7 @@
           <p:cNvPr id="6" name="スライド番号プレースホルダー 5">
             <a:extLst>
               <a:ext uri="{FF2B5EF4-FFF2-40B4-BE49-F238E27FC236}">
-                <a16:creationId xmlns:a16="http://schemas.microsoft.com/office/drawing/2014/main" id="{1BC2D064-DC64-3467-C478-B163A576CB76}"/>
+                <a16:creationId xmlns:a16="http://schemas.microsoft.com/office/drawing/2014/main" id="{01170EDA-E896-347C-8C61-BC12828A2EF3}"/>
               </a:ext>
             </a:extLst>
           </p:cNvPr>
@@ -3285,7 +3285,7 @@
             </a:lvl1pPr>
           </a:lstStyle>
           <a:p>
-            <a:fld id="{C3CC25DC-5C11-4F8D-AA87-CFFAB9558400}" type="slidenum">
+            <a:fld id="{AB4F66D4-50C9-4297-B4C6-C9969037CF83}" type="slidenum">
               <a:rPr kumimoji="1" lang="ja-JP" altLang="en-US" smtClean="0"/>
               <a:t>‹#›</a:t>
             </a:fld>
@@ -3296,7 +3296,7 @@
     </p:spTree>
     <p:extLst>
       <p:ext uri="{BB962C8B-B14F-4D97-AF65-F5344CB8AC3E}">
-        <p14:creationId xmlns:p14="http://schemas.microsoft.com/office/powerpoint/2010/main" val="2989498271"/>
+        <p14:creationId xmlns:p14="http://schemas.microsoft.com/office/powerpoint/2010/main" val="30648196"/>
       </p:ext>
     </p:extLst>
   </p:cSld>
@@ -3619,7 +3619,7 @@
           <p:cNvPr id="2" name="テキスト ボックス 1">
             <a:extLst>
               <a:ext uri="{FF2B5EF4-FFF2-40B4-BE49-F238E27FC236}">
-                <a16:creationId xmlns:a16="http://schemas.microsoft.com/office/drawing/2014/main" id="{3B08E282-98DD-FCF7-662F-D7B7C65361A5}"/>
+                <a16:creationId xmlns:a16="http://schemas.microsoft.com/office/drawing/2014/main" id="{55B8A2CB-946A-BACC-7E2E-9371EAEA7B60}"/>
               </a:ext>
             </a:extLst>
           </p:cNvPr>
@@ -3665,7 +3665,7 @@
           <p:cNvPr id="3" name="テキスト ボックス 2">
             <a:extLst>
               <a:ext uri="{FF2B5EF4-FFF2-40B4-BE49-F238E27FC236}">
-                <a16:creationId xmlns:a16="http://schemas.microsoft.com/office/drawing/2014/main" id="{67CCE9EB-0DED-3831-4C1A-1ACFE7489C22}"/>
+                <a16:creationId xmlns:a16="http://schemas.microsoft.com/office/drawing/2014/main" id="{E7EB33F8-AE24-0FC3-AA63-D9A29A53628F}"/>
               </a:ext>
             </a:extLst>
           </p:cNvPr>
@@ -3714,7 +3714,7 @@
           <p:cNvPr id="4" name="テキスト ボックス 3">
             <a:extLst>
               <a:ext uri="{FF2B5EF4-FFF2-40B4-BE49-F238E27FC236}">
-                <a16:creationId xmlns:a16="http://schemas.microsoft.com/office/drawing/2014/main" id="{17A301BB-85C9-67B5-B48B-A77C7E569C29}"/>
+                <a16:creationId xmlns:a16="http://schemas.microsoft.com/office/drawing/2014/main" id="{DFE2D0AF-DEE4-2BDA-B40E-4DAF37C9770C}"/>
               </a:ext>
             </a:extLst>
           </p:cNvPr>
@@ -3754,7 +3754,7 @@
           <p:cNvPr id="5" name="テキスト ボックス 4">
             <a:extLst>
               <a:ext uri="{FF2B5EF4-FFF2-40B4-BE49-F238E27FC236}">
-                <a16:creationId xmlns:a16="http://schemas.microsoft.com/office/drawing/2014/main" id="{55A5EF92-80DB-124B-6973-02C723134779}"/>
+                <a16:creationId xmlns:a16="http://schemas.microsoft.com/office/drawing/2014/main" id="{5E1122E6-D5CD-7A8B-1D26-0AFD626D3E15}"/>
               </a:ext>
             </a:extLst>
           </p:cNvPr>
@@ -3801,7 +3801,7 @@
             <a:hlinkClick r:id="" action="ppaction://media"/>
             <a:extLst>
               <a:ext uri="{FF2B5EF4-FFF2-40B4-BE49-F238E27FC236}">
-                <a16:creationId xmlns:a16="http://schemas.microsoft.com/office/drawing/2014/main" id="{EFB7D06E-9077-C5E7-1553-763B9E2ADA49}"/>
+                <a16:creationId xmlns:a16="http://schemas.microsoft.com/office/drawing/2014/main" id="{6E91C5CF-3F82-7F56-DCA8-21FD2A3033D8}"/>
               </a:ext>
             </a:extLst>
           </p:cNvPr>
@@ -3836,7 +3836,7 @@
     </p:spTree>
     <p:extLst>
       <p:ext uri="{BB962C8B-B14F-4D97-AF65-F5344CB8AC3E}">
-        <p14:creationId xmlns:p14="http://schemas.microsoft.com/office/powerpoint/2010/main" val="3111691942"/>
+        <p14:creationId xmlns:p14="http://schemas.microsoft.com/office/powerpoint/2010/main" val="2280215580"/>
       </p:ext>
     </p:extLst>
   </p:cSld>
@@ -3960,7 +3960,7 @@
           <p:cNvPr id="2" name="テキスト ボックス 1">
             <a:extLst>
               <a:ext uri="{FF2B5EF4-FFF2-40B4-BE49-F238E27FC236}">
-                <a16:creationId xmlns:a16="http://schemas.microsoft.com/office/drawing/2014/main" id="{A62AC8A0-5086-2B8C-7729-D18F78A3D110}"/>
+                <a16:creationId xmlns:a16="http://schemas.microsoft.com/office/drawing/2014/main" id="{EA7E9BA1-1405-61BA-A0A3-8411302A852B}"/>
               </a:ext>
             </a:extLst>
           </p:cNvPr>
@@ -4006,7 +4006,7 @@
           <p:cNvPr id="3" name="テキスト ボックス 2">
             <a:extLst>
               <a:ext uri="{FF2B5EF4-FFF2-40B4-BE49-F238E27FC236}">
-                <a16:creationId xmlns:a16="http://schemas.microsoft.com/office/drawing/2014/main" id="{BA0D69BA-A040-F0FF-A629-BCD27FC65799}"/>
+                <a16:creationId xmlns:a16="http://schemas.microsoft.com/office/drawing/2014/main" id="{04E1E72D-7A3E-E9A3-DC6B-272956C75AD5}"/>
               </a:ext>
             </a:extLst>
           </p:cNvPr>
@@ -4046,7 +4046,7 @@
           <p:cNvPr id="4" name="テキスト ボックス 3">
             <a:extLst>
               <a:ext uri="{FF2B5EF4-FFF2-40B4-BE49-F238E27FC236}">
-                <a16:creationId xmlns:a16="http://schemas.microsoft.com/office/drawing/2014/main" id="{6E12175A-FEE9-7B93-78D7-2C22240C0610}"/>
+                <a16:creationId xmlns:a16="http://schemas.microsoft.com/office/drawing/2014/main" id="{D50FFE07-B6FB-6F7A-4E35-3261DCB1A367}"/>
               </a:ext>
             </a:extLst>
           </p:cNvPr>
@@ -4076,14 +4076,17 @@
                 </a:solidFill>
                 <a:latin typeface="Arial" panose="020B0604020202020204" pitchFamily="34" charset="0"/>
               </a:rPr>
-              <a:t>About Laravel Laravel is a web application framework with expressive, elegant syntax</a:t>
-            </a:r>
-            <a:endParaRPr kumimoji="1" lang="ja-JP" altLang="en-US" sz="2000">
-              <a:solidFill>
-                <a:srgbClr val="333333"/>
-              </a:solidFill>
-              <a:latin typeface="Arial" panose="020B0604020202020204" pitchFamily="34" charset="0"/>
-            </a:endParaRPr>
+              <a:t>Funeral Hall Map</a:t>
+            </a:r>
+            <a:r>
+              <a:rPr kumimoji="1" lang="ja-JP" altLang="en-US" sz="2000">
+                <a:solidFill>
+                  <a:srgbClr val="333333"/>
+                </a:solidFill>
+                <a:latin typeface="Arial" panose="020B0604020202020204" pitchFamily="34" charset="0"/>
+              </a:rPr>
+              <a:t>の目的、構成、実装を公開コードから確認できるプロジェクトです。</a:t>
+            </a:r>
           </a:p>
         </p:txBody>
       </p:sp>
@@ -4092,7 +4095,7 @@
           <p:cNvPr id="5" name="テキスト ボックス 4">
             <a:extLst>
               <a:ext uri="{FF2B5EF4-FFF2-40B4-BE49-F238E27FC236}">
-                <a16:creationId xmlns:a16="http://schemas.microsoft.com/office/drawing/2014/main" id="{B6DA1225-3728-D932-B26F-40259C1A72C2}"/>
+                <a16:creationId xmlns:a16="http://schemas.microsoft.com/office/drawing/2014/main" id="{1A1D8346-BEA6-6B13-3117-51BE665BDCEA}"/>
               </a:ext>
             </a:extLst>
           </p:cNvPr>
@@ -4139,7 +4142,7 @@
             <a:hlinkClick r:id="" action="ppaction://media"/>
             <a:extLst>
               <a:ext uri="{FF2B5EF4-FFF2-40B4-BE49-F238E27FC236}">
-                <a16:creationId xmlns:a16="http://schemas.microsoft.com/office/drawing/2014/main" id="{5F423C89-6E60-F1AF-7AFA-464EDCF2948E}"/>
+                <a16:creationId xmlns:a16="http://schemas.microsoft.com/office/drawing/2014/main" id="{8CDF43F3-844A-6B2C-9AC0-2D21474C19B0}"/>
               </a:ext>
             </a:extLst>
           </p:cNvPr>
@@ -4174,7 +4177,7 @@
     </p:spTree>
     <p:extLst>
       <p:ext uri="{BB962C8B-B14F-4D97-AF65-F5344CB8AC3E}">
-        <p14:creationId xmlns:p14="http://schemas.microsoft.com/office/powerpoint/2010/main" val="2945244311"/>
+        <p14:creationId xmlns:p14="http://schemas.microsoft.com/office/powerpoint/2010/main" val="3119656630"/>
       </p:ext>
     </p:extLst>
   </p:cSld>
@@ -4217,7 +4220,7 @@
                                   <p:childTnLst>
                                     <p:cmd type="call" cmd="playFrom(0.0)">
                                       <p:cBhvr>
-                                        <p:cTn id="6" dur="7780" fill="hold"/>
+                                        <p:cTn id="6" dur="7476" fill="hold"/>
                                         <p:tgtEl>
                                           <p:spTgt spid="6"/>
                                         </p:tgtEl>
@@ -4298,7 +4301,7 @@
           <p:cNvPr id="2" name="テキスト ボックス 1">
             <a:extLst>
               <a:ext uri="{FF2B5EF4-FFF2-40B4-BE49-F238E27FC236}">
-                <a16:creationId xmlns:a16="http://schemas.microsoft.com/office/drawing/2014/main" id="{4CD9F0A9-1B8C-0DA8-423D-953579DFEC81}"/>
+                <a16:creationId xmlns:a16="http://schemas.microsoft.com/office/drawing/2014/main" id="{ED9CF5DC-9445-73C6-D96F-8C7CEC9C90D1}"/>
               </a:ext>
             </a:extLst>
           </p:cNvPr>
@@ -4344,7 +4347,7 @@
           <p:cNvPr id="3" name="テキスト ボックス 2">
             <a:extLst>
               <a:ext uri="{FF2B5EF4-FFF2-40B4-BE49-F238E27FC236}">
-                <a16:creationId xmlns:a16="http://schemas.microsoft.com/office/drawing/2014/main" id="{E55F3E3A-3E90-911C-C4D3-709447784A5E}"/>
+                <a16:creationId xmlns:a16="http://schemas.microsoft.com/office/drawing/2014/main" id="{E9D69C0D-D114-60ED-3D02-768E88C08ADA}"/>
               </a:ext>
             </a:extLst>
           </p:cNvPr>
@@ -4384,7 +4387,7 @@
           <p:cNvPr id="4" name="テキスト ボックス 3">
             <a:extLst>
               <a:ext uri="{FF2B5EF4-FFF2-40B4-BE49-F238E27FC236}">
-                <a16:creationId xmlns:a16="http://schemas.microsoft.com/office/drawing/2014/main" id="{7D828AE3-1E30-C4EC-144F-834730F6AC0D}"/>
+                <a16:creationId xmlns:a16="http://schemas.microsoft.com/office/drawing/2014/main" id="{F1C39B3B-E00D-2DC0-40CD-382264442D65}"/>
               </a:ext>
             </a:extLst>
           </p:cNvPr>
@@ -4497,7 +4500,7 @@
           <p:cNvPr id="5" name="テキスト ボックス 4">
             <a:extLst>
               <a:ext uri="{FF2B5EF4-FFF2-40B4-BE49-F238E27FC236}">
-                <a16:creationId xmlns:a16="http://schemas.microsoft.com/office/drawing/2014/main" id="{FF549F90-2612-81FE-82FE-44DA8E5DFA1A}"/>
+                <a16:creationId xmlns:a16="http://schemas.microsoft.com/office/drawing/2014/main" id="{46D4BB0C-2175-AB56-350A-652555E2FE69}"/>
               </a:ext>
             </a:extLst>
           </p:cNvPr>
@@ -4544,7 +4547,7 @@
             <a:hlinkClick r:id="" action="ppaction://media"/>
             <a:extLst>
               <a:ext uri="{FF2B5EF4-FFF2-40B4-BE49-F238E27FC236}">
-                <a16:creationId xmlns:a16="http://schemas.microsoft.com/office/drawing/2014/main" id="{3BD39CEB-206A-D2E1-5701-F9CFD1F1D89A}"/>
+                <a16:creationId xmlns:a16="http://schemas.microsoft.com/office/drawing/2014/main" id="{8A23F032-B8F0-957B-8685-9A495D9BE456}"/>
               </a:ext>
             </a:extLst>
           </p:cNvPr>
@@ -4579,7 +4582,7 @@
     </p:spTree>
     <p:extLst>
       <p:ext uri="{BB962C8B-B14F-4D97-AF65-F5344CB8AC3E}">
-        <p14:creationId xmlns:p14="http://schemas.microsoft.com/office/powerpoint/2010/main" val="599006277"/>
+        <p14:creationId xmlns:p14="http://schemas.microsoft.com/office/powerpoint/2010/main" val="166426472"/>
       </p:ext>
     </p:extLst>
   </p:cSld>
@@ -4703,7 +4706,7 @@
           <p:cNvPr id="2" name="テキスト ボックス 1">
             <a:extLst>
               <a:ext uri="{FF2B5EF4-FFF2-40B4-BE49-F238E27FC236}">
-                <a16:creationId xmlns:a16="http://schemas.microsoft.com/office/drawing/2014/main" id="{02AC993D-713B-4E9E-E4A9-2E8C5E1C59E9}"/>
+                <a16:creationId xmlns:a16="http://schemas.microsoft.com/office/drawing/2014/main" id="{E593446C-8A57-2545-9AB8-31F31A434D52}"/>
               </a:ext>
             </a:extLst>
           </p:cNvPr>
@@ -4749,7 +4752,7 @@
           <p:cNvPr id="3" name="テキスト ボックス 2">
             <a:extLst>
               <a:ext uri="{FF2B5EF4-FFF2-40B4-BE49-F238E27FC236}">
-                <a16:creationId xmlns:a16="http://schemas.microsoft.com/office/drawing/2014/main" id="{4EA403D3-AF5D-D16B-1D3B-FB8A104A9026}"/>
+                <a16:creationId xmlns:a16="http://schemas.microsoft.com/office/drawing/2014/main" id="{8BA74041-28F1-7FDC-2B91-5DBBD8EA91F6}"/>
               </a:ext>
             </a:extLst>
           </p:cNvPr>
@@ -4789,7 +4792,7 @@
           <p:cNvPr id="4" name="テキスト ボックス 3">
             <a:extLst>
               <a:ext uri="{FF2B5EF4-FFF2-40B4-BE49-F238E27FC236}">
-                <a16:creationId xmlns:a16="http://schemas.microsoft.com/office/drawing/2014/main" id="{601F007A-A5EA-89C6-3720-5648778BD97D}"/>
+                <a16:creationId xmlns:a16="http://schemas.microsoft.com/office/drawing/2014/main" id="{E454A7E0-9E3E-9333-FB19-654329192A81}"/>
               </a:ext>
             </a:extLst>
           </p:cNvPr>
@@ -4899,7 +4902,7 @@
           <p:cNvPr id="5" name="テキスト ボックス 4">
             <a:extLst>
               <a:ext uri="{FF2B5EF4-FFF2-40B4-BE49-F238E27FC236}">
-                <a16:creationId xmlns:a16="http://schemas.microsoft.com/office/drawing/2014/main" id="{E071A929-BD00-1722-1361-4AFE129C1A11}"/>
+                <a16:creationId xmlns:a16="http://schemas.microsoft.com/office/drawing/2014/main" id="{9798806D-1676-F156-02FD-E8237FB56348}"/>
               </a:ext>
             </a:extLst>
           </p:cNvPr>
@@ -4946,7 +4949,7 @@
             <a:hlinkClick r:id="" action="ppaction://media"/>
             <a:extLst>
               <a:ext uri="{FF2B5EF4-FFF2-40B4-BE49-F238E27FC236}">
-                <a16:creationId xmlns:a16="http://schemas.microsoft.com/office/drawing/2014/main" id="{2AFEEC6F-D09E-756C-D63B-8D36E44463BC}"/>
+                <a16:creationId xmlns:a16="http://schemas.microsoft.com/office/drawing/2014/main" id="{9588BD93-760B-F80A-7527-4D4EFA741688}"/>
               </a:ext>
             </a:extLst>
           </p:cNvPr>
@@ -4981,7 +4984,7 @@
     </p:spTree>
     <p:extLst>
       <p:ext uri="{BB962C8B-B14F-4D97-AF65-F5344CB8AC3E}">
-        <p14:creationId xmlns:p14="http://schemas.microsoft.com/office/powerpoint/2010/main" val="3703787445"/>
+        <p14:creationId xmlns:p14="http://schemas.microsoft.com/office/powerpoint/2010/main" val="170892157"/>
       </p:ext>
     </p:extLst>
   </p:cSld>
@@ -5105,7 +5108,7 @@
           <p:cNvPr id="2" name="テキスト ボックス 1">
             <a:extLst>
               <a:ext uri="{FF2B5EF4-FFF2-40B4-BE49-F238E27FC236}">
-                <a16:creationId xmlns:a16="http://schemas.microsoft.com/office/drawing/2014/main" id="{D5824A95-9705-C64D-D237-8F1FC20D039F}"/>
+                <a16:creationId xmlns:a16="http://schemas.microsoft.com/office/drawing/2014/main" id="{CC709ABB-D927-47BB-2E55-800477BF965E}"/>
               </a:ext>
             </a:extLst>
           </p:cNvPr>
@@ -5151,7 +5154,7 @@
           <p:cNvPr id="3" name="テキスト ボックス 2">
             <a:extLst>
               <a:ext uri="{FF2B5EF4-FFF2-40B4-BE49-F238E27FC236}">
-                <a16:creationId xmlns:a16="http://schemas.microsoft.com/office/drawing/2014/main" id="{0680903D-3FC3-E5B0-74DA-A48CEDB93B6A}"/>
+                <a16:creationId xmlns:a16="http://schemas.microsoft.com/office/drawing/2014/main" id="{9CD287A8-3B16-C428-D4FF-FF6495117365}"/>
               </a:ext>
             </a:extLst>
           </p:cNvPr>
@@ -5191,7 +5194,7 @@
           <p:cNvPr id="4" name="テキスト ボックス 3">
             <a:extLst>
               <a:ext uri="{FF2B5EF4-FFF2-40B4-BE49-F238E27FC236}">
-                <a16:creationId xmlns:a16="http://schemas.microsoft.com/office/drawing/2014/main" id="{F68D70BC-B8DB-E600-138D-ADE286A6E1B2}"/>
+                <a16:creationId xmlns:a16="http://schemas.microsoft.com/office/drawing/2014/main" id="{6A1AC3E0-F6DD-09A7-51DB-13D3B9B62963}"/>
               </a:ext>
             </a:extLst>
           </p:cNvPr>
@@ -5215,58 +5218,13 @@
           <a:lstStyle/>
           <a:p>
             <a:r>
-              <a:rPr kumimoji="1" lang="en-US" altLang="ja-JP" sz="2000">
-                <a:solidFill>
-                  <a:srgbClr val="333333"/>
-                </a:solidFill>
-                <a:latin typeface="Arial" panose="020B0604020202020204" pitchFamily="34" charset="0"/>
-              </a:rPr>
-              <a:t>CheckCostReportWatches: </a:t>
-            </a:r>
-            <a:r>
               <a:rPr kumimoji="1" lang="ja-JP" altLang="en-US" sz="2000">
                 <a:solidFill>
                   <a:srgbClr val="333333"/>
                 </a:solidFill>
                 <a:latin typeface="Arial" panose="020B0604020202020204" pitchFamily="34" charset="0"/>
               </a:rPr>
-              <a:t>検知カーソルを</a:t>
-            </a:r>
-            <a:r>
-              <a:rPr kumimoji="1" lang="en-US" altLang="ja-JP" sz="2000">
-                <a:solidFill>
-                  <a:srgbClr val="333333"/>
-                </a:solidFill>
-                <a:latin typeface="Arial" panose="020B0604020202020204" pitchFamily="34" charset="0"/>
-              </a:rPr>
-              <a:t>created_at</a:t>
-            </a:r>
-            <a:r>
-              <a:rPr kumimoji="1" lang="ja-JP" altLang="en-US" sz="2000">
-                <a:solidFill>
-                  <a:srgbClr val="333333"/>
-                </a:solidFill>
-                <a:latin typeface="Arial" panose="020B0604020202020204" pitchFamily="34" charset="0"/>
-              </a:rPr>
-              <a:t>から</a:t>
-            </a:r>
-            <a:r>
-              <a:rPr kumimoji="1" lang="en-US" altLang="ja-JP" sz="2000">
-                <a:solidFill>
-                  <a:srgbClr val="333333"/>
-                </a:solidFill>
-                <a:latin typeface="Arial" panose="020B0604020202020204" pitchFamily="34" charset="0"/>
-              </a:rPr>
-              <a:t>cost_reports.id</a:t>
-            </a:r>
-            <a:r>
-              <a:rPr kumimoji="1" lang="ja-JP" altLang="en-US" sz="2000">
-                <a:solidFill>
-                  <a:srgbClr val="333333"/>
-                </a:solidFill>
-                <a:latin typeface="Arial" panose="020B0604020202020204" pitchFamily="34" charset="0"/>
-              </a:rPr>
-              <a:t>ベースに変更</a:t>
+              <a:t>直近のコミットでは、新機能の追加と実装強化が行われました。</a:t>
             </a:r>
           </a:p>
         </p:txBody>
@@ -5276,7 +5234,7 @@
           <p:cNvPr id="5" name="テキスト ボックス 4">
             <a:extLst>
               <a:ext uri="{FF2B5EF4-FFF2-40B4-BE49-F238E27FC236}">
-                <a16:creationId xmlns:a16="http://schemas.microsoft.com/office/drawing/2014/main" id="{3B02BA3A-7424-9632-4A5C-4829229F52D1}"/>
+                <a16:creationId xmlns:a16="http://schemas.microsoft.com/office/drawing/2014/main" id="{296B3071-7896-CDB9-D232-C454DD6F02FC}"/>
               </a:ext>
             </a:extLst>
           </p:cNvPr>
@@ -5323,7 +5281,7 @@
             <a:hlinkClick r:id="" action="ppaction://media"/>
             <a:extLst>
               <a:ext uri="{FF2B5EF4-FFF2-40B4-BE49-F238E27FC236}">
-                <a16:creationId xmlns:a16="http://schemas.microsoft.com/office/drawing/2014/main" id="{CB7644F6-44E3-96D1-7D5C-5AEEE02CAD85}"/>
+                <a16:creationId xmlns:a16="http://schemas.microsoft.com/office/drawing/2014/main" id="{15DA181B-2218-1754-8EA0-2EC9FA82B81C}"/>
               </a:ext>
             </a:extLst>
           </p:cNvPr>
@@ -5358,7 +5316,7 @@
     </p:spTree>
     <p:extLst>
       <p:ext uri="{BB962C8B-B14F-4D97-AF65-F5344CB8AC3E}">
-        <p14:creationId xmlns:p14="http://schemas.microsoft.com/office/powerpoint/2010/main" val="125605795"/>
+        <p14:creationId xmlns:p14="http://schemas.microsoft.com/office/powerpoint/2010/main" val="1656527223"/>
       </p:ext>
     </p:extLst>
   </p:cSld>
@@ -5367,10 +5325,10 @@
   </p:clrMapOvr>
   <mc:AlternateContent xmlns:mc="http://schemas.openxmlformats.org/markup-compatibility/2006">
     <mc:Choice xmlns:p14="http://schemas.microsoft.com/office/powerpoint/2010/main" Requires="p14">
-      <p:transition spd="slow" p14:dur="2000" advTm="12000"/>
+      <p:transition spd="slow" p14:dur="2000" advTm="6000"/>
     </mc:Choice>
     <mc:Fallback>
-      <p:transition spd="slow" advTm="12000"/>
+      <p:transition spd="slow" advTm="6000"/>
     </mc:Fallback>
   </mc:AlternateContent>
   <p:timing>
@@ -5401,7 +5359,7 @@
                                   <p:childTnLst>
                                     <p:cmd type="call" cmd="playFrom(0.0)">
                                       <p:cBhvr>
-                                        <p:cTn id="6" dur="11469" fill="hold"/>
+                                        <p:cTn id="6" dur="5687" fill="hold"/>
                                         <p:tgtEl>
                                           <p:spTgt spid="6"/>
                                         </p:tgtEl>
@@ -5482,7 +5440,7 @@
           <p:cNvPr id="2" name="テキスト ボックス 1">
             <a:extLst>
               <a:ext uri="{FF2B5EF4-FFF2-40B4-BE49-F238E27FC236}">
-                <a16:creationId xmlns:a16="http://schemas.microsoft.com/office/drawing/2014/main" id="{DA860765-7050-3FDC-0AFE-3AA9B461E7AB}"/>
+                <a16:creationId xmlns:a16="http://schemas.microsoft.com/office/drawing/2014/main" id="{C389DC92-BF0D-7F38-C6C6-24DDC6CB8181}"/>
               </a:ext>
             </a:extLst>
           </p:cNvPr>
@@ -5528,7 +5486,7 @@
           <p:cNvPr id="3" name="テキスト ボックス 2">
             <a:extLst>
               <a:ext uri="{FF2B5EF4-FFF2-40B4-BE49-F238E27FC236}">
-                <a16:creationId xmlns:a16="http://schemas.microsoft.com/office/drawing/2014/main" id="{32E90D1B-55B3-4392-8790-80CD60EA541F}"/>
+                <a16:creationId xmlns:a16="http://schemas.microsoft.com/office/drawing/2014/main" id="{0693A213-84E9-CB1B-9FEF-964C25D24D4A}"/>
               </a:ext>
             </a:extLst>
           </p:cNvPr>
@@ -5568,7 +5526,7 @@
           <p:cNvPr id="4" name="テキスト ボックス 3">
             <a:extLst>
               <a:ext uri="{FF2B5EF4-FFF2-40B4-BE49-F238E27FC236}">
-                <a16:creationId xmlns:a16="http://schemas.microsoft.com/office/drawing/2014/main" id="{49F79BA6-8612-4F51-C12B-351BA3197FC9}"/>
+                <a16:creationId xmlns:a16="http://schemas.microsoft.com/office/drawing/2014/main" id="{1E093A5A-A560-9F51-D7F4-1DA2BF34CBC0}"/>
               </a:ext>
             </a:extLst>
           </p:cNvPr>
@@ -5633,7 +5591,7 @@
           <p:cNvPr id="5" name="テキスト ボックス 4">
             <a:extLst>
               <a:ext uri="{FF2B5EF4-FFF2-40B4-BE49-F238E27FC236}">
-                <a16:creationId xmlns:a16="http://schemas.microsoft.com/office/drawing/2014/main" id="{E611D513-3DD7-C5FE-09A5-3D8E1DBAFB6E}"/>
+                <a16:creationId xmlns:a16="http://schemas.microsoft.com/office/drawing/2014/main" id="{04F6915E-2672-4315-1C89-22E51B53395B}"/>
               </a:ext>
             </a:extLst>
           </p:cNvPr>
@@ -5680,7 +5638,7 @@
             <a:hlinkClick r:id="" action="ppaction://media"/>
             <a:extLst>
               <a:ext uri="{FF2B5EF4-FFF2-40B4-BE49-F238E27FC236}">
-                <a16:creationId xmlns:a16="http://schemas.microsoft.com/office/drawing/2014/main" id="{5DFC8F53-A932-C176-5880-64F7A0C93E2B}"/>
+                <a16:creationId xmlns:a16="http://schemas.microsoft.com/office/drawing/2014/main" id="{F14E5869-7B30-A831-E665-23BFB9DC753B}"/>
               </a:ext>
             </a:extLst>
           </p:cNvPr>
@@ -5715,7 +5673,7 @@
     </p:spTree>
     <p:extLst>
       <p:ext uri="{BB962C8B-B14F-4D97-AF65-F5344CB8AC3E}">
-        <p14:creationId xmlns:p14="http://schemas.microsoft.com/office/powerpoint/2010/main" val="2369406487"/>
+        <p14:creationId xmlns:p14="http://schemas.microsoft.com/office/powerpoint/2010/main" val="1335930116"/>
       </p:ext>
     </p:extLst>
   </p:cSld>
